--- a/dist/초2/도덕·윤리/정직과약속/초2_도덕·윤리_정직과약속_01_정직과약속.pptx
+++ b/dist/초2/도덕·윤리/정직과약속/초2_도덕·윤리_정직과약속_01_정직과약속.pptx
@@ -120,13 +120,13 @@
   <p:extLst>
     <p:ext uri="{521415D9-36F7-43E2-AB2F-B90AF26B5E84}">
       <p14:sectionLst xmlns:p14="http://schemas.microsoft.com/office/powerpoint/2010/main">
-        <p14:section name="도입" id="{77db8041-1e46-2bb2-ef9e-644c15dc031d}">
+        <p14:section name="도입" id="{d2805cbc-691c-91a0-29c0-9cf6542e564c}">
           <p14:sldIdLst>
             <p14:sldId id="256"/>
             <p14:sldId id="257"/>
           </p14:sldIdLst>
         </p14:section>
-        <p14:section name="개념" id="{1497dda9-bcbe-6b4a-4112-4c1f52188c3a}">
+        <p14:section name="개념" id="{527c0192-3b5a-ce27-20f5-613301b2d7f2}">
           <p14:sldIdLst>
             <p14:sldId id="258"/>
             <p14:sldId id="259"/>
@@ -134,38 +134,38 @@
             <p14:sldId id="263"/>
           </p14:sldIdLst>
         </p14:section>
-        <p14:section name="연습" id="{666bdbd9-480d-ec79-ab02-c4c447897abc}">
+        <p14:section name="연습" id="{d4e41194-e252-99c1-8c56-1b34a2c10a74}">
           <p14:sldIdLst>
             <p14:sldId id="260"/>
             <p14:sldId id="262"/>
             <p14:sldId id="264"/>
           </p14:sldIdLst>
         </p14:section>
-        <p14:section name="개념" id="{16556f57-81e7-f48f-1050-679cfba8bc52}">
+        <p14:section name="개념" id="{af7e963d-bc16-ad31-6e57-579d478a5265}">
           <p14:sldIdLst/>
         </p14:section>
-        <p14:section name="연습" id="{ea0af62d-cc17-48cf-ee32-7ad37fb0761e}">
+        <p14:section name="연습" id="{d738d75e-9578-c521-7c16-105181bb96f0}">
           <p14:sldIdLst/>
         </p14:section>
-        <p14:section name="개념" id="{ca92b5ae-5c67-2bec-9c38-6a9b62b1f60e}">
+        <p14:section name="개념" id="{32d3726f-5690-adb8-6ef1-9bf5f3c5b741}">
           <p14:sldIdLst/>
         </p14:section>
-        <p14:section name="연습" id="{8bea0d9d-c5b4-9773-fe79-822b32ed4ebd}">
+        <p14:section name="연습" id="{dc4a95e0-fb12-cea4-1c2f-1011a8d8f5e6}">
           <p14:sldIdLst/>
         </p14:section>
-        <p14:section name="확인" id="{38356eec-4dea-4998-6d05-82fa610544cc}">
+        <p14:section name="확인" id="{d2e5246a-1be1-7128-4b3e-e0a9a9ef4b80}">
           <p14:sldIdLst>
             <p14:sldId id="265"/>
             <p14:sldId id="266"/>
             <p14:sldId id="267"/>
           </p14:sldIdLst>
         </p14:section>
-        <p14:section name="정리" id="{02104e2b-97c8-46aa-c3e6-9555472d4d5a}">
+        <p14:section name="정리" id="{ff985a02-ca63-2222-77ca-db292b173a60}">
           <p14:sldIdLst>
             <p14:sldId id="268"/>
           </p14:sldIdLst>
         </p14:section>
-        <p14:section name="보충" id="{66c71530-8bf4-802d-8abd-dced9932108c}">
+        <p14:section name="보충" id="{d4972d1e-879d-e9f6-5b34-a40d44104053}">
           <p14:sldIdLst>
             <p14:sldId id="269"/>
           </p14:sldIdLst>

--- a/dist/초2/도덕·윤리/정직과약속/초2_도덕·윤리_정직과약속_01_정직과약속.pptx
+++ b/dist/초2/도덕·윤리/정직과약속/초2_도덕·윤리_정직과약속_01_정직과약속.pptx
@@ -120,13 +120,13 @@
   <p:extLst>
     <p:ext uri="{521415D9-36F7-43E2-AB2F-B90AF26B5E84}">
       <p14:sectionLst xmlns:p14="http://schemas.microsoft.com/office/powerpoint/2010/main">
-        <p14:section name="도입" id="{d2805cbc-691c-91a0-29c0-9cf6542e564c}">
+        <p14:section name="도입" id="{acf8cb15-56cb-bc5f-248a-ba25c53ae322}">
           <p14:sldIdLst>
             <p14:sldId id="256"/>
             <p14:sldId id="257"/>
           </p14:sldIdLst>
         </p14:section>
-        <p14:section name="개념" id="{527c0192-3b5a-ce27-20f5-613301b2d7f2}">
+        <p14:section name="개념" id="{549475a6-211e-7148-3834-c737f6cefc33}">
           <p14:sldIdLst>
             <p14:sldId id="258"/>
             <p14:sldId id="259"/>
@@ -134,38 +134,38 @@
             <p14:sldId id="263"/>
           </p14:sldIdLst>
         </p14:section>
-        <p14:section name="연습" id="{d4e41194-e252-99c1-8c56-1b34a2c10a74}">
+        <p14:section name="연습" id="{4c60e3e8-9e22-68c2-6ed7-cc361cfd559c}">
           <p14:sldIdLst>
             <p14:sldId id="260"/>
             <p14:sldId id="262"/>
             <p14:sldId id="264"/>
           </p14:sldIdLst>
         </p14:section>
-        <p14:section name="개념" id="{af7e963d-bc16-ad31-6e57-579d478a5265}">
+        <p14:section name="개념" id="{40a3ada3-7e6e-b8d0-6f87-fe8f40f31557}">
           <p14:sldIdLst/>
         </p14:section>
-        <p14:section name="연습" id="{d738d75e-9578-c521-7c16-105181bb96f0}">
+        <p14:section name="연습" id="{94cfcc9b-2f09-0cc7-1376-de6a50abb9e7}">
           <p14:sldIdLst/>
         </p14:section>
-        <p14:section name="개념" id="{32d3726f-5690-adb8-6ef1-9bf5f3c5b741}">
+        <p14:section name="개념" id="{e1dc0506-2381-e1fe-405f-1e8a77ba7746}">
           <p14:sldIdLst/>
         </p14:section>
-        <p14:section name="연습" id="{dc4a95e0-fb12-cea4-1c2f-1011a8d8f5e6}">
+        <p14:section name="연습" id="{49821dd4-ab26-89b1-b424-183c10ac7b33}">
           <p14:sldIdLst/>
         </p14:section>
-        <p14:section name="확인" id="{d2e5246a-1be1-7128-4b3e-e0a9a9ef4b80}">
+        <p14:section name="확인" id="{96be5d0f-994c-c13e-47c8-c130c6016c37}">
           <p14:sldIdLst>
             <p14:sldId id="265"/>
             <p14:sldId id="266"/>
             <p14:sldId id="267"/>
           </p14:sldIdLst>
         </p14:section>
-        <p14:section name="정리" id="{ff985a02-ca63-2222-77ca-db292b173a60}">
+        <p14:section name="정리" id="{ca2cfc40-4f5f-b80d-0d49-905fe3812fb0}">
           <p14:sldIdLst>
             <p14:sldId id="268"/>
           </p14:sldIdLst>
         </p14:section>
-        <p14:section name="보충" id="{d4972d1e-879d-e9f6-5b34-a40d44104053}">
+        <p14:section name="보충" id="{d3b2ddc8-deb2-0618-89fc-39a9707df188}">
           <p14:sldIdLst>
             <p14:sldId id="269"/>
           </p14:sldIdLst>
@@ -1077,7 +1077,7 @@
 - 약속을 ‘함께 정한 것’이라고 말하고, 지키면 믿을 수 있다(기쁘다)는 것을 말하면 맞습니다.
 막히면
 - 새끼손가락을 걸고 실제로 작은 약속을 하고, 수업이 끝나면 꼭 지켜 보여 줍니다.
-- 이 차시는 계획상 앞 차시가 없습니다. 약속이나 규칙의 뜻이 낯설면 1학년 사회 ‘함께 지킬 약속’을 먼저 함께 하면 좋습니다.
+- 약속이나 규칙의 뜻이 낯설면 1학년 사회 ‘함께 지킬 약속’을 먼저 함께 하면 좋습니다.
 주의
 - 보충이 오래 걸리면 오늘은 여기까지 하고, 다음 날 S02부터 다시 시작합니다.</a:t>
             </a:r>
@@ -1168,7 +1168,7 @@
             <a:r>
               <a:rPr lang="en-US" dirty="0"/>
               <a:t>[S02 · 선수 확인(약속의 뜻과 마음 말하기)]
-목적: 약속이 무엇인지 알고, 약속이 지켜지지 않았을 때의 마음을 말할 수 있는지 확인합니다. 이 차시는 계획상 앞 차시가 없으므로, 1학년 때 배운 ‘함께 지킬 약속’과 생활 경험을 확인합니다.
+목적: 약속이 무엇인지 알고, 약속이 지켜지지 않았을 때의 마음을 말할 수 있는지 확인합니다. 앞 차시 ‘나는 소중해요’와 1학년 ‘함께 지킬 약속’에서 배운 것, 생활 경험을 확인합니다.
 시간: 약 3분
 이렇게 말해 보세요
 - “네가 지킨 약속 하나를 말해 줄래? 누구랑, 무엇을 하기로 했어?”
